--- a/exercises/regression/regression_exercises.pptx
+++ b/exercises/regression/regression_exercises.pptx
@@ -255,7 +255,7 @@
             <a:fld id="{57AF82F7-3B33-6D48-9626-CABC5CBE1A55}" type="datetime1">
               <a:rPr lang="it-IT" altLang="x-none"/>
               <a:pPr/>
-              <a:t>28/06/25</a:t>
+              <a:t>19/06/26</a:t>
             </a:fld>
             <a:endParaRPr lang="it-IT" altLang="x-none"/>
           </a:p>
@@ -513,7 +513,7 @@
               </a14:hiddenFill>
             </a:ext>
             <a:ext uri="{FAA26D3D-D897-4be2-8F04-BA451C77F1D7}">
-              <ma14:placeholderFlag xmlns="" xmlns:ma14="http://schemas.microsoft.com/office/mac/drawingml/2011/main" val="1"/>
+              <ma14:placeholderFlag xmlns:ma14="http://schemas.microsoft.com/office/mac/drawingml/2011/main" xmlns="" val="1"/>
             </a:ext>
           </a:extLst>
         </p:spPr>
@@ -2273,7 +2273,7 @@
               </a14:hiddenLine>
             </a:ext>
             <a:ext uri="{FAA26D3D-D897-4be2-8F04-BA451C77F1D7}">
-              <ma14:placeholderFlag xmlns="" xmlns:ma14="http://schemas.microsoft.com/office/mac/drawingml/2011/main" val="1"/>
+              <ma14:placeholderFlag xmlns:ma14="http://schemas.microsoft.com/office/mac/drawingml/2011/main" xmlns="" val="1"/>
             </a:ext>
           </a:extLst>
         </p:spPr>
@@ -2334,7 +2334,7 @@
               </a14:hiddenLine>
             </a:ext>
             <a:ext uri="{FAA26D3D-D897-4be2-8F04-BA451C77F1D7}">
-              <ma14:placeholderFlag xmlns="" xmlns:ma14="http://schemas.microsoft.com/office/mac/drawingml/2011/main" val="1"/>
+              <ma14:placeholderFlag xmlns:ma14="http://schemas.microsoft.com/office/mac/drawingml/2011/main" xmlns="" val="1"/>
             </a:ext>
           </a:extLst>
         </p:spPr>
@@ -2856,7 +2856,7 @@
                 </a:solidFill>
                 <a:ea typeface="ＭＳ Ｐゴシック" charset="-128"/>
               </a:rPr>
-              <a:t>Feed-Forward</a:t>
+              <a:t>Feedforward</a:t>
             </a:r>
             <a:r>
               <a:rPr lang="fr-CH" altLang="x-none" sz="4400" dirty="0">
@@ -3882,7 +3882,7 @@
                   </a14:hiddenLine>
                 </a:ext>
                 <a:ext uri="{FAA26D3D-D897-4be2-8F04-BA451C77F1D7}">
-                  <ma14:placeholderFlag xmlns="" xmlns:ma14="http://schemas.microsoft.com/office/mac/drawingml/2011/main" val="1"/>
+                  <ma14:placeholderFlag xmlns:ma14="http://schemas.microsoft.com/office/mac/drawingml/2011/main" xmlns="" val="1"/>
                 </a:ext>
               </a:extLst>
             </p:spPr>
@@ -4638,7 +4638,7 @@
               </a14:hiddenLine>
             </a:ext>
             <a:ext uri="{FAA26D3D-D897-4be2-8F04-BA451C77F1D7}">
-              <ma14:placeholderFlag xmlns="" xmlns:ma14="http://schemas.microsoft.com/office/mac/drawingml/2011/main" val="1"/>
+              <ma14:placeholderFlag xmlns:ma14="http://schemas.microsoft.com/office/mac/drawingml/2011/main" xmlns="" val="1"/>
             </a:ext>
           </a:extLst>
         </p:spPr>
@@ -5565,10 +5565,10 @@
       </p:sp>
       <p:pic>
         <p:nvPicPr>
-          <p:cNvPr id="6" name="Picture 5" descr="\documentclass{article}&#10;\usepackage{amsmath}&#10;\usepackage{amsfonts}&#10;&#10;\pagestyle{empty}&#10;&#10;\begin{document}&#10;&#10;\begin{equation*}&#10;\tau_{f} = -F_v \dot q(t)&#10;\end{equation*}&#10;&#10;\end{document}" title="IguanaTex Bitmap Display">
+          <p:cNvPr id="5" name="Picture 4">
             <a:extLst>
               <a:ext uri="{FF2B5EF4-FFF2-40B4-BE49-F238E27FC236}">
-                <a16:creationId xmlns:a16="http://schemas.microsoft.com/office/drawing/2014/main" id="{87B6F4CD-A61C-492D-7942-C0BDB92F8D82}"/>
+                <a16:creationId xmlns:a16="http://schemas.microsoft.com/office/drawing/2014/main" id="{0FDD0066-CB44-7A01-65C2-11CAA59E8641}"/>
               </a:ext>
             </a:extLst>
           </p:cNvPr>
@@ -5589,8 +5589,8 @@
         </p:blipFill>
         <p:spPr>
           <a:xfrm>
-            <a:off x="4007768" y="1898527"/>
-            <a:ext cx="1454744" cy="280740"/>
+            <a:off x="4007769" y="1898528"/>
+            <a:ext cx="1247507" cy="265427"/>
           </a:xfrm>
           <a:prstGeom prst="rect">
             <a:avLst/>
@@ -5793,10 +5793,10 @@
       </p:sp>
       <p:pic>
         <p:nvPicPr>
-          <p:cNvPr id="5" name="Picture 4" descr="\documentclass{article}&#10;\usepackage{amsmath}&#10;\usepackage{amsfonts}&#10;&#10;\pagestyle{empty}&#10;&#10;\begin{document}&#10;&#10;\begin{equation*}&#10;\tau_{f}(t) = -F_v \dot q(t) - F_c \text{sign}(\dot q(t))&#10;\end{equation*}&#10;&#10;\end{document}" title="IguanaTex Bitmap Display">
+          <p:cNvPr id="8" name="Picture 7">
             <a:extLst>
               <a:ext uri="{FF2B5EF4-FFF2-40B4-BE49-F238E27FC236}">
-                <a16:creationId xmlns:a16="http://schemas.microsoft.com/office/drawing/2014/main" id="{A3E70E4C-6CDF-2456-5AF2-0B3BFEA9C39C}"/>
+                <a16:creationId xmlns:a16="http://schemas.microsoft.com/office/drawing/2014/main" id="{2DD545F2-7E64-7910-253F-2F457DB090DD}"/>
               </a:ext>
             </a:extLst>
           </p:cNvPr>
@@ -5817,8 +5817,8 @@
         </p:blipFill>
         <p:spPr>
           <a:xfrm>
-            <a:off x="5015880" y="1916114"/>
-            <a:ext cx="3096344" cy="258029"/>
+            <a:off x="5015880" y="1916115"/>
+            <a:ext cx="2906810" cy="243955"/>
           </a:xfrm>
           <a:prstGeom prst="rect">
             <a:avLst/>
@@ -6024,19 +6024,21 @@
 
 <file path=ppt/tags/tag5.xml><?xml version="1.0" encoding="utf-8"?>
 <p:tagLst xmlns:a="http://schemas.openxmlformats.org/drawingml/2006/main" xmlns:r="http://schemas.openxmlformats.org/officeDocument/2006/relationships" xmlns:p="http://schemas.openxmlformats.org/presentationml/2006/main">
-  <p:tag name="OUTPUTDPI" val="1200"/>
-  <p:tag name="ORIGINALHEIGHT" val="11"/>
-  <p:tag name="ORIGINALWIDTH" val="57"/>
-  <p:tag name="OUTPUTTYPE" val="PDF"/>
-  <p:tag name="IGUANATEXVERSION" val="160"/>
-  <p:tag name="LATEXADDIN" val="\documentclass{article}&#10;\usepackage{amsmath}&#10;\usepackage{amsfonts}&#10;&#10;\pagestyle{empty}&#10;&#10;\begin{document}&#10;&#10;\begin{equation*}&#10;\tau_{f} = -F_v \dot q(t)&#10;\end{equation*}&#10;&#10;\end{document}"/>
+  <p:tag name="OUTPUTDPI" val=" 1200"/>
+  <p:tag name="ORIGINALHEIGHT" val=" 130"/>
+  <p:tag name="ORIGINALWIDTH" val=" 611"/>
+  <p:tag name="OUTPUTTYPE" val="PNG"/>
+  <p:tag name="IGUANATEXVERSION" val="162"/>
+  <p:tag name="LATEXADDIN" val="\documentclass{article}&#10;\usepackage{amsmath}&#10;\usepackage{amsfonts}&#10;&#10;\pagestyle{empty}&#10;&#10;\begin{document}&#10;&#10;\begin{equation*}&#10;\tau_{f} = F_v \dot q(t)&#10;\end{equation*}&#10;&#10;\end{document}"/>
   <p:tag name="IGUANATEXSIZE" val="18"/>
-  <p:tag name="IGUANATEXCURSOR" val="123"/>
+  <p:tag name="IGUANATEXCURSOR" val="134"/>
   <p:tag name="TRANSPARENCY" val="True"/>
+  <p:tag name="CHOOSECOLOR" val="False"/>
+  <p:tag name="COLORHEX" val="000000"/>
   <p:tag name="LATEXENGINEID" val="0"/>
   <p:tag name="TEMPFOLDER" val="/Users/marco.forgione/Library/Containers/com.microsoft.Powerpoint/Data/tmp/TemporaryItems/"/>
-  <p:tag name="LATEXFORMHEIGHT" val="426.65"/>
-  <p:tag name="LATEXFORMWIDTH" val="513.35"/>
+  <p:tag name="LATEXFORMHEIGHT" val=" 426.65"/>
+  <p:tag name="LATEXFORMWIDTH" val=" 513.35"/>
   <p:tag name="LATEXFORMWRAP" val="True"/>
   <p:tag name="BITMAPVECTOR" val="0"/>
 </p:tagLst>
@@ -6084,19 +6086,21 @@
 
 <file path=ppt/tags/tag8.xml><?xml version="1.0" encoding="utf-8"?>
 <p:tagLst xmlns:a="http://schemas.openxmlformats.org/drawingml/2006/main" xmlns:r="http://schemas.openxmlformats.org/officeDocument/2006/relationships" xmlns:p="http://schemas.openxmlformats.org/presentationml/2006/main">
-  <p:tag name="OUTPUTDPI" val="1200"/>
-  <p:tag name="ORIGINALHEIGHT" val="11"/>
-  <p:tag name="ORIGINALWIDTH" val="132"/>
-  <p:tag name="OUTPUTTYPE" val="PDF"/>
-  <p:tag name="IGUANATEXVERSION" val="160"/>
-  <p:tag name="LATEXADDIN" val="\documentclass{article}&#10;\usepackage{amsmath}&#10;\usepackage{amsfonts}&#10;&#10;\pagestyle{empty}&#10;&#10;\begin{document}&#10;&#10;\begin{equation*}&#10;\tau_{f}(t) = -F_v \dot q(t) - F_c \text{sign}(\dot q(t))&#10;\end{equation*}&#10;&#10;\end{document}"/>
+  <p:tag name="OUTPUTDPI" val=" 1200"/>
+  <p:tag name="ORIGINALHEIGHT" val=" 130"/>
+  <p:tag name="ORIGINALWIDTH" val=" 1549"/>
+  <p:tag name="OUTPUTTYPE" val="PNG"/>
+  <p:tag name="IGUANATEXVERSION" val="162"/>
+  <p:tag name="LATEXADDIN" val="\documentclass{article}&#10;\usepackage{amsmath}&#10;\usepackage{amsfonts}&#10;&#10;\pagestyle{empty}&#10;&#10;\begin{document}&#10;&#10;\begin{equation*}&#10;\tau_{f}(t) = F_v \dot q(t) + F_c \text{sign}(\dot q(t))&#10;\end{equation*}&#10;&#10;\end{document}"/>
   <p:tag name="IGUANATEXSIZE" val="18"/>
-  <p:tag name="IGUANATEXCURSOR" val="123"/>
+  <p:tag name="IGUANATEXCURSOR" val="153"/>
   <p:tag name="TRANSPARENCY" val="True"/>
+  <p:tag name="CHOOSECOLOR" val="False"/>
+  <p:tag name="COLORHEX" val="000000"/>
   <p:tag name="LATEXENGINEID" val="0"/>
   <p:tag name="TEMPFOLDER" val="/Users/marco.forgione/Library/Containers/com.microsoft.Powerpoint/Data/tmp/TemporaryItems/"/>
-  <p:tag name="LATEXFORMHEIGHT" val="426.65"/>
-  <p:tag name="LATEXFORMWIDTH" val="513.35"/>
+  <p:tag name="LATEXFORMHEIGHT" val=" 426.65"/>
+  <p:tag name="LATEXFORMWIDTH" val=" 513.35"/>
   <p:tag name="LATEXFORMWRAP" val="True"/>
   <p:tag name="BITMAPVECTOR" val="0"/>
 </p:tagLst>
@@ -7540,6 +7544,15 @@
 </file>
 
 <file path=customXml/item1.xml><?xml version="1.0" encoding="utf-8"?>
+<?mso-contentType ?>
+<FormTemplates xmlns="http://schemas.microsoft.com/sharepoint/v3/contenttype/forms">
+  <Display>DocumentLibraryForm</Display>
+  <Edit>DocumentLibraryForm</Edit>
+  <New>DocumentLibraryForm</New>
+</FormTemplates>
+</file>
+
+<file path=customXml/item2.xml><?xml version="1.0" encoding="utf-8"?>
 <ct:contentTypeSchema xmlns:ct="http://schemas.microsoft.com/office/2006/metadata/contentType" xmlns:ma="http://schemas.microsoft.com/office/2006/metadata/properties/metaAttributes" ct:_="" ma:_="" ma:contentTypeName="Document" ma:contentTypeID="0x010100E943B4D0C91CA54E9BBFAD215D4A4FF7" ma:contentTypeVersion="18" ma:contentTypeDescription="Create a new document." ma:contentTypeScope="" ma:versionID="48c4930ddcec7bff74490998dd84a4c1">
   <xsd:schema xmlns:xsd="http://www.w3.org/2001/XMLSchema" xmlns:xs="http://www.w3.org/2001/XMLSchema" xmlns:p="http://schemas.microsoft.com/office/2006/metadata/properties" xmlns:ns2="0c05fedb-ed2a-4eb3-93de-5f5a6c97bfe0" xmlns:ns3="c69d801c-64cd-49bc-b1b3-ec2496ede094" targetNamespace="http://schemas.microsoft.com/office/2006/metadata/properties" ma:root="true" ma:fieldsID="dcb337392c8a5973c5e221652a72fbb4" ns2:_="" ns3:_="">
     <xsd:import namespace="0c05fedb-ed2a-4eb3-93de-5f5a6c97bfe0"/>
@@ -7794,15 +7807,6 @@
 </ct:contentTypeSchema>
 </file>
 
-<file path=customXml/item2.xml><?xml version="1.0" encoding="utf-8"?>
-<?mso-contentType ?>
-<FormTemplates xmlns="http://schemas.microsoft.com/sharepoint/v3/contenttype/forms">
-  <Display>DocumentLibraryForm</Display>
-  <Edit>DocumentLibraryForm</Edit>
-  <New>DocumentLibraryForm</New>
-</FormTemplates>
-</file>
-
 <file path=customXml/item3.xml><?xml version="1.0" encoding="utf-8"?>
 <p:properties xmlns:p="http://schemas.microsoft.com/office/2006/metadata/properties" xmlns:xsi="http://www.w3.org/2001/XMLSchema-instance" xmlns:pc="http://schemas.microsoft.com/office/infopath/2007/PartnerControls">
   <documentManagement>
@@ -7815,6 +7819,14 @@
 </file>
 
 <file path=customXml/itemProps1.xml><?xml version="1.0" encoding="utf-8"?>
+<ds:datastoreItem xmlns:ds="http://schemas.openxmlformats.org/officeDocument/2006/customXml" ds:itemID="{957E0BBE-38AF-4179-B401-F6E82B6A5F3D}">
+  <ds:schemaRefs>
+    <ds:schemaRef ds:uri="http://schemas.microsoft.com/sharepoint/v3/contenttype/forms"/>
+  </ds:schemaRefs>
+</ds:datastoreItem>
+</file>
+
+<file path=customXml/itemProps2.xml><?xml version="1.0" encoding="utf-8"?>
 <ds:datastoreItem xmlns:ds="http://schemas.openxmlformats.org/officeDocument/2006/customXml" ds:itemID="{950C4CF8-8E6C-4481-8DE0-79509E1800D4}">
   <ds:schemaRefs>
     <ds:schemaRef ds:uri="http://schemas.microsoft.com/office/2006/metadata/contentType"/>
@@ -7829,14 +7841,6 @@
     <ds:schemaRef ds:uri="http://purl.org/dc/elements/1.1/"/>
     <ds:schemaRef ds:uri="http://purl.org/dc/terms/"/>
     <ds:schemaRef ds:uri="http://schemas.microsoft.com/internal/obd"/>
-  </ds:schemaRefs>
-</ds:datastoreItem>
-</file>
-
-<file path=customXml/itemProps2.xml><?xml version="1.0" encoding="utf-8"?>
-<ds:datastoreItem xmlns:ds="http://schemas.openxmlformats.org/officeDocument/2006/customXml" ds:itemID="{957E0BBE-38AF-4179-B401-F6E82B6A5F3D}">
-  <ds:schemaRefs>
-    <ds:schemaRef ds:uri="http://schemas.microsoft.com/sharepoint/v3/contenttype/forms"/>
   </ds:schemaRefs>
 </ds:datastoreItem>
 </file>
